--- a/26RBU142_SIH26056_BharatBytes.pptx
+++ b/26RBU142_SIH26056_BharatBytes.pptx
@@ -5900,363 +5900,31 @@
           </a:p>
         </p:txBody>
       </p:sp>
-      <p:pic>
-        <p:nvPicPr>
-          <p:cNvPr id="39" name="Picture 38" descr="n_hero_index.png"/>
-          <p:cNvPicPr>
-            <a:picLocks noChangeAspect="1"/>
-          </p:cNvPicPr>
-          <p:nvPr/>
-        </p:nvPicPr>
-        <p:blipFill>
-          <a:blip r:embed="rId4"/>
-          <a:stretch>
-            <a:fillRect/>
-          </a:stretch>
-        </p:blipFill>
+      <p:sp>
+        <p:nvSpPr>
+          <p:cNvPr id="39" name="Rounded Rectangle 38">
+            <a:hlinkClick r:id="rId4"/>
+          </p:cNvPr>
+          <p:cNvSpPr/>
+          <p:nvPr/>
+        </p:nvSpPr>
         <p:spPr>
           <a:xfrm>
             <a:off x="329184" y="4370832"/>
-            <a:ext cx="3968496" cy="1347155"/>
-          </a:xfrm>
-          <a:prstGeom prst="rect">
-            <a:avLst/>
-          </a:prstGeom>
-          <a:effectLst/>
-        </p:spPr>
-      </p:pic>
-      <p:sp>
-        <p:nvSpPr>
-          <p:cNvPr id="40" name="TextBox 39"/>
-          <p:cNvSpPr txBox="1"/>
-          <p:nvPr/>
-        </p:nvSpPr>
-        <p:spPr>
-          <a:xfrm>
-            <a:off x="329184" y="5754563"/>
-            <a:ext cx="3968496" cy="201168"/>
-          </a:xfrm>
-          <a:prstGeom prst="rect">
-            <a:avLst/>
-          </a:prstGeom>
-          <a:noFill/>
-          <a:effectLst/>
-        </p:spPr>
-        <p:txBody>
-          <a:bodyPr wrap="square" anchor="t" lIns="0" rIns="0" tIns="0" bIns="0">
-            <a:spAutoFit/>
-          </a:bodyPr>
-          <a:lstStyle/>
-          <a:p>
-            <a:pPr algn="l">
-              <a:lnSpc>
-                <a:spcPct val="104000"/>
-              </a:lnSpc>
-              <a:spcBef>
-                <a:spcPts val="0"/>
-              </a:spcBef>
-              <a:spcAft>
-                <a:spcPts val="200"/>
-              </a:spcAft>
-            </a:pPr>
-            <a:r>
-              <a:rPr sz="680" b="1" i="0">
-                <a:solidFill>
-                  <a:srgbClr val="1F497D"/>
-                </a:solidFill>
-                <a:latin typeface="Arial"/>
-              </a:rPr>
-              <a:t>Source:  </a:t>
-            </a:r>
-            <a:r>
-              <a:rPr sz="680" b="0" i="0">
-                <a:solidFill>
-                  <a:srgbClr val="8A93A2"/>
-                </a:solidFill>
-                <a:latin typeface="Arial"/>
-              </a:rPr>
-              <a:t>Modelled on the VIMAAN sampling design. Base 2024 = 100, as in CPI 2024.</a:t>
-            </a:r>
-          </a:p>
-        </p:txBody>
-      </p:sp>
-      <p:sp>
-        <p:nvSpPr>
-          <p:cNvPr id="41" name="TextBox 40"/>
-          <p:cNvSpPr txBox="1"/>
-          <p:nvPr/>
-        </p:nvSpPr>
-        <p:spPr>
-          <a:xfrm>
-            <a:off x="4425696" y="4498848"/>
-            <a:ext cx="1517904" cy="274320"/>
-          </a:xfrm>
-          <a:prstGeom prst="rect">
-            <a:avLst/>
-          </a:prstGeom>
-          <a:noFill/>
-          <a:effectLst/>
-        </p:spPr>
-        <p:txBody>
-          <a:bodyPr wrap="square" anchor="t" lIns="0" rIns="0" tIns="0" bIns="0">
-            <a:spAutoFit/>
-          </a:bodyPr>
-          <a:lstStyle/>
-          <a:p>
-            <a:pPr algn="l">
-              <a:spcBef>
-                <a:spcPts val="0"/>
-              </a:spcBef>
-              <a:spcAft>
-                <a:spcPts val="200"/>
-              </a:spcAft>
-            </a:pPr>
-            <a:r>
-              <a:rPr sz="1300" b="1" i="0">
-                <a:solidFill>
-                  <a:srgbClr val="B86B00"/>
-                </a:solidFill>
-                <a:latin typeface="Arial"/>
-              </a:rPr>
-              <a:t>517</a:t>
-            </a:r>
-          </a:p>
-        </p:txBody>
-      </p:sp>
-      <p:sp>
-        <p:nvSpPr>
-          <p:cNvPr id="42" name="TextBox 41"/>
-          <p:cNvSpPr txBox="1"/>
-          <p:nvPr/>
-        </p:nvSpPr>
-        <p:spPr>
-          <a:xfrm>
-            <a:off x="4425696" y="4718304"/>
-            <a:ext cx="1517904" cy="182880"/>
-          </a:xfrm>
-          <a:prstGeom prst="rect">
-            <a:avLst/>
-          </a:prstGeom>
-          <a:noFill/>
-          <a:effectLst/>
-        </p:spPr>
-        <p:txBody>
-          <a:bodyPr wrap="square" anchor="t" lIns="0" rIns="0" tIns="0" bIns="0">
-            <a:spAutoFit/>
-          </a:bodyPr>
-          <a:lstStyle/>
-          <a:p>
-            <a:pPr algn="l">
-              <a:spcBef>
-                <a:spcPts val="0"/>
-              </a:spcBef>
-              <a:spcAft>
-                <a:spcPts val="200"/>
-              </a:spcAft>
-            </a:pPr>
-            <a:r>
-              <a:rPr sz="650" b="1" i="0">
-                <a:solidFill>
-                  <a:srgbClr val="8A93A2"/>
-                </a:solidFill>
-                <a:latin typeface="Arial"/>
-              </a:rPr>
-              <a:t>ROUTES, 3× A DAY</a:t>
-            </a:r>
-          </a:p>
-        </p:txBody>
-      </p:sp>
-      <p:sp>
-        <p:nvSpPr>
-          <p:cNvPr id="43" name="TextBox 42"/>
-          <p:cNvSpPr txBox="1"/>
-          <p:nvPr/>
-        </p:nvSpPr>
-        <p:spPr>
-          <a:xfrm>
-            <a:off x="4425696" y="4974336"/>
-            <a:ext cx="1517904" cy="274320"/>
-          </a:xfrm>
-          <a:prstGeom prst="rect">
-            <a:avLst/>
-          </a:prstGeom>
-          <a:noFill/>
-          <a:effectLst/>
-        </p:spPr>
-        <p:txBody>
-          <a:bodyPr wrap="square" anchor="t" lIns="0" rIns="0" tIns="0" bIns="0">
-            <a:spAutoFit/>
-          </a:bodyPr>
-          <a:lstStyle/>
-          <a:p>
-            <a:pPr algn="l">
-              <a:spcBef>
-                <a:spcPts val="0"/>
-              </a:spcBef>
-              <a:spcAft>
-                <a:spcPts val="200"/>
-              </a:spcAft>
-            </a:pPr>
-            <a:r>
-              <a:rPr sz="1300" b="1" i="0">
-                <a:solidFill>
-                  <a:srgbClr val="B86B00"/>
-                </a:solidFill>
-                <a:latin typeface="Arial"/>
-              </a:rPr>
-              <a:t>78 → 517</a:t>
-            </a:r>
-          </a:p>
-        </p:txBody>
-      </p:sp>
-      <p:sp>
-        <p:nvSpPr>
-          <p:cNvPr id="44" name="TextBox 43"/>
-          <p:cNvSpPr txBox="1"/>
-          <p:nvPr/>
-        </p:nvSpPr>
-        <p:spPr>
-          <a:xfrm>
-            <a:off x="4425696" y="5193792"/>
-            <a:ext cx="1517904" cy="182880"/>
-          </a:xfrm>
-          <a:prstGeom prst="rect">
-            <a:avLst/>
-          </a:prstGeom>
-          <a:noFill/>
-          <a:effectLst/>
-        </p:spPr>
-        <p:txBody>
-          <a:bodyPr wrap="square" anchor="t" lIns="0" rIns="0" tIns="0" bIns="0">
-            <a:spAutoFit/>
-          </a:bodyPr>
-          <a:lstStyle/>
-          <a:p>
-            <a:pPr algn="l">
-              <a:spcBef>
-                <a:spcPts val="0"/>
-              </a:spcBef>
-              <a:spcAft>
-                <a:spcPts val="200"/>
-              </a:spcAft>
-            </a:pPr>
-            <a:r>
-              <a:rPr sz="650" b="1" i="0">
-                <a:solidFill>
-                  <a:srgbClr val="8A93A2"/>
-                </a:solidFill>
-                <a:latin typeface="Arial"/>
-              </a:rPr>
-              <a:t>VS DGCA TODAY</a:t>
-            </a:r>
-          </a:p>
-        </p:txBody>
-      </p:sp>
-      <p:sp>
-        <p:nvSpPr>
-          <p:cNvPr id="45" name="TextBox 44"/>
-          <p:cNvSpPr txBox="1"/>
-          <p:nvPr/>
-        </p:nvSpPr>
-        <p:spPr>
-          <a:xfrm>
-            <a:off x="4425696" y="5449824"/>
-            <a:ext cx="1517904" cy="274320"/>
-          </a:xfrm>
-          <a:prstGeom prst="rect">
-            <a:avLst/>
-          </a:prstGeom>
-          <a:noFill/>
-          <a:effectLst/>
-        </p:spPr>
-        <p:txBody>
-          <a:bodyPr wrap="square" anchor="t" lIns="0" rIns="0" tIns="0" bIns="0">
-            <a:spAutoFit/>
-          </a:bodyPr>
-          <a:lstStyle/>
-          <a:p>
-            <a:pPr algn="l">
-              <a:spcBef>
-                <a:spcPts val="0"/>
-              </a:spcBef>
-              <a:spcAft>
-                <a:spcPts val="200"/>
-              </a:spcAft>
-            </a:pPr>
-            <a:r>
-              <a:rPr sz="1300" b="1" i="0">
-                <a:solidFill>
-                  <a:srgbClr val="B86B00"/>
-                </a:solidFill>
-                <a:latin typeface="Arial"/>
-              </a:rPr>
-              <a:t>SDMX</a:t>
-            </a:r>
-          </a:p>
-        </p:txBody>
-      </p:sp>
-      <p:sp>
-        <p:nvSpPr>
-          <p:cNvPr id="46" name="TextBox 45"/>
-          <p:cNvSpPr txBox="1"/>
-          <p:nvPr/>
-        </p:nvSpPr>
-        <p:spPr>
-          <a:xfrm>
-            <a:off x="4425696" y="5669280"/>
-            <a:ext cx="1517904" cy="182880"/>
-          </a:xfrm>
-          <a:prstGeom prst="rect">
-            <a:avLst/>
-          </a:prstGeom>
-          <a:noFill/>
-          <a:effectLst/>
-        </p:spPr>
-        <p:txBody>
-          <a:bodyPr wrap="square" anchor="t" lIns="0" rIns="0" tIns="0" bIns="0">
-            <a:spAutoFit/>
-          </a:bodyPr>
-          <a:lstStyle/>
-          <a:p>
-            <a:pPr algn="l">
-              <a:spcBef>
-                <a:spcPts val="0"/>
-              </a:spcBef>
-              <a:spcAft>
-                <a:spcPts val="200"/>
-              </a:spcAft>
-            </a:pPr>
-            <a:r>
-              <a:rPr sz="650" b="1" i="0">
-                <a:solidFill>
-                  <a:srgbClr val="8A93A2"/>
-                </a:solidFill>
-                <a:latin typeface="Arial"/>
-              </a:rPr>
-              <a:t>FEED INTO CPI 2024</a:t>
-            </a:r>
-          </a:p>
-        </p:txBody>
-      </p:sp>
-      <p:sp>
-        <p:nvSpPr>
-          <p:cNvPr id="47" name="Rectangle 46"/>
-          <p:cNvSpPr/>
-          <p:nvPr/>
-        </p:nvSpPr>
-        <p:spPr>
-          <a:xfrm>
-            <a:off x="329184" y="6089904"/>
-            <a:ext cx="5577840" cy="20320"/>
-          </a:xfrm>
-          <a:prstGeom prst="rect">
-            <a:avLst/>
+            <a:ext cx="5577840" cy="402336"/>
+          </a:xfrm>
+          <a:prstGeom prst="roundRect">
+            <a:avLst>
+              <a:gd name="adj" fmla="val 6000"/>
+            </a:avLst>
           </a:prstGeom>
           <a:solidFill>
             <a:srgbClr val="1F497D"/>
           </a:solidFill>
-          <a:ln>
-            <a:noFill/>
+          <a:ln w="9525">
+            <a:solidFill>
+              <a:srgbClr val="1F497D"/>
+            </a:solidFill>
           </a:ln>
           <a:effectLst/>
         </p:spPr>
@@ -6275,6 +5943,70 @@
           </a:fontRef>
         </p:style>
         <p:txBody>
+          <a:bodyPr rtlCol="0" anchor="ctr" wrap="square" tIns="54864" bIns="54864"/>
+          <a:lstStyle/>
+          <a:p>
+            <a:pPr algn="l"/>
+            <a:r>
+              <a:rPr sz="1150" b="1" i="0">
+                <a:solidFill>
+                  <a:srgbClr val="FFFFFF"/>
+                </a:solidFill>
+                <a:latin typeface="Arial"/>
+              </a:rPr>
+              <a:t>      WATCH THE PROTOTYPE WALKTHROUGH</a:t>
+            </a:r>
+            <a:r>
+              <a:rPr sz="950" b="1" i="0">
+                <a:solidFill>
+                  <a:srgbClr val="F3C67A"/>
+                </a:solidFill>
+                <a:latin typeface="Arial"/>
+              </a:rPr>
+              <a:t>     drive.google.com</a:t>
+            </a:r>
+          </a:p>
+        </p:txBody>
+      </p:sp>
+      <p:sp>
+        <p:nvSpPr>
+          <p:cNvPr id="40" name="Isosceles Triangle 39">
+            <a:hlinkClick r:id="rId4"/>
+          </p:cNvPr>
+          <p:cNvSpPr/>
+          <p:nvPr/>
+        </p:nvSpPr>
+        <p:spPr>
+          <a:xfrm rot="5400000">
+            <a:off x="484632" y="4480560"/>
+            <a:ext cx="146304" cy="182880"/>
+          </a:xfrm>
+          <a:prstGeom prst="triangle">
+            <a:avLst/>
+          </a:prstGeom>
+          <a:solidFill>
+            <a:srgbClr val="F3C67A"/>
+          </a:solidFill>
+          <a:ln>
+            <a:noFill/>
+          </a:ln>
+          <a:effectLst/>
+        </p:spPr>
+        <p:style>
+          <a:lnRef idx="1">
+            <a:schemeClr val="accent1"/>
+          </a:lnRef>
+          <a:fillRef idx="3">
+            <a:schemeClr val="accent1"/>
+          </a:fillRef>
+          <a:effectRef idx="2">
+            <a:schemeClr val="accent1"/>
+          </a:effectRef>
+          <a:fontRef idx="minor">
+            <a:schemeClr val="lt1"/>
+          </a:fontRef>
+        </p:style>
+        <p:txBody>
           <a:bodyPr rtlCol="0" anchor="ctr"/>
           <a:lstStyle/>
           <a:p>
@@ -6282,16 +6014,41 @@
           </a:p>
         </p:txBody>
       </p:sp>
-      <p:sp>
-        <p:nvSpPr>
-          <p:cNvPr id="48" name="TextBox 47"/>
+      <p:pic>
+        <p:nvPicPr>
+          <p:cNvPr id="41" name="Picture 40" descr="n_hero_index.png"/>
+          <p:cNvPicPr>
+            <a:picLocks noChangeAspect="1"/>
+          </p:cNvPicPr>
+          <p:nvPr/>
+        </p:nvPicPr>
+        <p:blipFill>
+          <a:blip r:embed="rId5"/>
+          <a:stretch>
+            <a:fillRect/>
+          </a:stretch>
+        </p:blipFill>
+        <p:spPr>
+          <a:xfrm>
+            <a:off x="329184" y="4882896"/>
+            <a:ext cx="3968496" cy="1347155"/>
+          </a:xfrm>
+          <a:prstGeom prst="rect">
+            <a:avLst/>
+          </a:prstGeom>
+          <a:effectLst/>
+        </p:spPr>
+      </p:pic>
+      <p:sp>
+        <p:nvSpPr>
+          <p:cNvPr id="42" name="TextBox 41"/>
           <p:cNvSpPr txBox="1"/>
           <p:nvPr/>
         </p:nvSpPr>
         <p:spPr>
           <a:xfrm>
-            <a:off x="329184" y="6153912"/>
-            <a:ext cx="5577840" cy="237744"/>
+            <a:off x="329184" y="6266627"/>
+            <a:ext cx="3968496" cy="201168"/>
           </a:xfrm>
           <a:prstGeom prst="rect">
             <a:avLst/>
@@ -6307,7 +6064,7 @@
           <a:p>
             <a:pPr algn="l">
               <a:lnSpc>
-                <a:spcPct val="106000"/>
+                <a:spcPct val="104000"/>
               </a:lnSpc>
               <a:spcBef>
                 <a:spcPts val="0"/>
@@ -6317,36 +6074,337 @@
               </a:spcAft>
             </a:pPr>
             <a:r>
-              <a:rPr sz="760" b="1" i="0">
+              <a:rPr sz="680" b="1" i="0">
+                <a:solidFill>
+                  <a:srgbClr val="1F497D"/>
+                </a:solidFill>
+                <a:latin typeface="Arial"/>
+              </a:rPr>
+              <a:t>Source:  </a:t>
+            </a:r>
+            <a:r>
+              <a:rPr sz="680" b="0" i="0">
+                <a:solidFill>
+                  <a:srgbClr val="8A93A2"/>
+                </a:solidFill>
+                <a:latin typeface="Arial"/>
+              </a:rPr>
+              <a:t>Modelled on the VIMAAN sampling design. Base 2024 = 100, as in CPI 2024.</a:t>
+            </a:r>
+          </a:p>
+        </p:txBody>
+      </p:sp>
+      <p:sp>
+        <p:nvSpPr>
+          <p:cNvPr id="43" name="TextBox 42"/>
+          <p:cNvSpPr txBox="1"/>
+          <p:nvPr/>
+        </p:nvSpPr>
+        <p:spPr>
+          <a:xfrm>
+            <a:off x="4425696" y="4992624"/>
+            <a:ext cx="1517904" cy="274320"/>
+          </a:xfrm>
+          <a:prstGeom prst="rect">
+            <a:avLst/>
+          </a:prstGeom>
+          <a:noFill/>
+          <a:effectLst/>
+        </p:spPr>
+        <p:txBody>
+          <a:bodyPr wrap="square" anchor="t" lIns="0" rIns="0" tIns="0" bIns="0">
+            <a:spAutoFit/>
+          </a:bodyPr>
+          <a:lstStyle/>
+          <a:p>
+            <a:pPr algn="l">
+              <a:spcBef>
+                <a:spcPts val="0"/>
+              </a:spcBef>
+              <a:spcAft>
+                <a:spcPts val="200"/>
+              </a:spcAft>
+            </a:pPr>
+            <a:r>
+              <a:rPr sz="1300" b="1" i="0">
                 <a:solidFill>
                   <a:srgbClr val="B86B00"/>
                 </a:solidFill>
                 <a:latin typeface="Arial"/>
               </a:rPr>
-              <a:t>WALKTHROUGH  </a:t>
-            </a:r>
-            <a:r>
-              <a:rPr sz="900" b="1" i="0">
-                <a:solidFill>
-                  <a:srgbClr val="1F497D"/>
-                </a:solidFill>
-                <a:latin typeface="Arial"/>
-                <a:hlinkClick r:id="rId5"/>
-              </a:rPr>
-              <a:t>Prototype video and screens on Google Drive</a:t>
-            </a:r>
-          </a:p>
-        </p:txBody>
-      </p:sp>
-      <p:sp>
-        <p:nvSpPr>
-          <p:cNvPr id="49" name="TextBox 48"/>
+              <a:t>517</a:t>
+            </a:r>
+          </a:p>
+        </p:txBody>
+      </p:sp>
+      <p:sp>
+        <p:nvSpPr>
+          <p:cNvPr id="44" name="TextBox 43"/>
           <p:cNvSpPr txBox="1"/>
           <p:nvPr/>
         </p:nvSpPr>
         <p:spPr>
           <a:xfrm>
-            <a:off x="329184" y="6419088"/>
+            <a:off x="4425696" y="5212080"/>
+            <a:ext cx="1517904" cy="182880"/>
+          </a:xfrm>
+          <a:prstGeom prst="rect">
+            <a:avLst/>
+          </a:prstGeom>
+          <a:noFill/>
+          <a:effectLst/>
+        </p:spPr>
+        <p:txBody>
+          <a:bodyPr wrap="square" anchor="t" lIns="0" rIns="0" tIns="0" bIns="0">
+            <a:spAutoFit/>
+          </a:bodyPr>
+          <a:lstStyle/>
+          <a:p>
+            <a:pPr algn="l">
+              <a:spcBef>
+                <a:spcPts val="0"/>
+              </a:spcBef>
+              <a:spcAft>
+                <a:spcPts val="200"/>
+              </a:spcAft>
+            </a:pPr>
+            <a:r>
+              <a:rPr sz="650" b="1" i="0">
+                <a:solidFill>
+                  <a:srgbClr val="8A93A2"/>
+                </a:solidFill>
+                <a:latin typeface="Arial"/>
+              </a:rPr>
+              <a:t>ROUTES, 3× A DAY</a:t>
+            </a:r>
+          </a:p>
+        </p:txBody>
+      </p:sp>
+      <p:sp>
+        <p:nvSpPr>
+          <p:cNvPr id="45" name="TextBox 44"/>
+          <p:cNvSpPr txBox="1"/>
+          <p:nvPr/>
+        </p:nvSpPr>
+        <p:spPr>
+          <a:xfrm>
+            <a:off x="4425696" y="5468112"/>
+            <a:ext cx="1517904" cy="274320"/>
+          </a:xfrm>
+          <a:prstGeom prst="rect">
+            <a:avLst/>
+          </a:prstGeom>
+          <a:noFill/>
+          <a:effectLst/>
+        </p:spPr>
+        <p:txBody>
+          <a:bodyPr wrap="square" anchor="t" lIns="0" rIns="0" tIns="0" bIns="0">
+            <a:spAutoFit/>
+          </a:bodyPr>
+          <a:lstStyle/>
+          <a:p>
+            <a:pPr algn="l">
+              <a:spcBef>
+                <a:spcPts val="0"/>
+              </a:spcBef>
+              <a:spcAft>
+                <a:spcPts val="200"/>
+              </a:spcAft>
+            </a:pPr>
+            <a:r>
+              <a:rPr sz="1300" b="1" i="0">
+                <a:solidFill>
+                  <a:srgbClr val="B86B00"/>
+                </a:solidFill>
+                <a:latin typeface="Arial"/>
+              </a:rPr>
+              <a:t>78 → 517</a:t>
+            </a:r>
+          </a:p>
+        </p:txBody>
+      </p:sp>
+      <p:sp>
+        <p:nvSpPr>
+          <p:cNvPr id="46" name="TextBox 45"/>
+          <p:cNvSpPr txBox="1"/>
+          <p:nvPr/>
+        </p:nvSpPr>
+        <p:spPr>
+          <a:xfrm>
+            <a:off x="4425696" y="5687568"/>
+            <a:ext cx="1517904" cy="182880"/>
+          </a:xfrm>
+          <a:prstGeom prst="rect">
+            <a:avLst/>
+          </a:prstGeom>
+          <a:noFill/>
+          <a:effectLst/>
+        </p:spPr>
+        <p:txBody>
+          <a:bodyPr wrap="square" anchor="t" lIns="0" rIns="0" tIns="0" bIns="0">
+            <a:spAutoFit/>
+          </a:bodyPr>
+          <a:lstStyle/>
+          <a:p>
+            <a:pPr algn="l">
+              <a:spcBef>
+                <a:spcPts val="0"/>
+              </a:spcBef>
+              <a:spcAft>
+                <a:spcPts val="200"/>
+              </a:spcAft>
+            </a:pPr>
+            <a:r>
+              <a:rPr sz="650" b="1" i="0">
+                <a:solidFill>
+                  <a:srgbClr val="8A93A2"/>
+                </a:solidFill>
+                <a:latin typeface="Arial"/>
+              </a:rPr>
+              <a:t>VS DGCA TODAY</a:t>
+            </a:r>
+          </a:p>
+        </p:txBody>
+      </p:sp>
+      <p:sp>
+        <p:nvSpPr>
+          <p:cNvPr id="47" name="TextBox 46"/>
+          <p:cNvSpPr txBox="1"/>
+          <p:nvPr/>
+        </p:nvSpPr>
+        <p:spPr>
+          <a:xfrm>
+            <a:off x="4425696" y="5943600"/>
+            <a:ext cx="1517904" cy="274320"/>
+          </a:xfrm>
+          <a:prstGeom prst="rect">
+            <a:avLst/>
+          </a:prstGeom>
+          <a:noFill/>
+          <a:effectLst/>
+        </p:spPr>
+        <p:txBody>
+          <a:bodyPr wrap="square" anchor="t" lIns="0" rIns="0" tIns="0" bIns="0">
+            <a:spAutoFit/>
+          </a:bodyPr>
+          <a:lstStyle/>
+          <a:p>
+            <a:pPr algn="l">
+              <a:spcBef>
+                <a:spcPts val="0"/>
+              </a:spcBef>
+              <a:spcAft>
+                <a:spcPts val="200"/>
+              </a:spcAft>
+            </a:pPr>
+            <a:r>
+              <a:rPr sz="1300" b="1" i="0">
+                <a:solidFill>
+                  <a:srgbClr val="B86B00"/>
+                </a:solidFill>
+                <a:latin typeface="Arial"/>
+              </a:rPr>
+              <a:t>SDMX</a:t>
+            </a:r>
+          </a:p>
+        </p:txBody>
+      </p:sp>
+      <p:sp>
+        <p:nvSpPr>
+          <p:cNvPr id="48" name="TextBox 47"/>
+          <p:cNvSpPr txBox="1"/>
+          <p:nvPr/>
+        </p:nvSpPr>
+        <p:spPr>
+          <a:xfrm>
+            <a:off x="4425696" y="6163056"/>
+            <a:ext cx="1517904" cy="182880"/>
+          </a:xfrm>
+          <a:prstGeom prst="rect">
+            <a:avLst/>
+          </a:prstGeom>
+          <a:noFill/>
+          <a:effectLst/>
+        </p:spPr>
+        <p:txBody>
+          <a:bodyPr wrap="square" anchor="t" lIns="0" rIns="0" tIns="0" bIns="0">
+            <a:spAutoFit/>
+          </a:bodyPr>
+          <a:lstStyle/>
+          <a:p>
+            <a:pPr algn="l">
+              <a:spcBef>
+                <a:spcPts val="0"/>
+              </a:spcBef>
+              <a:spcAft>
+                <a:spcPts val="200"/>
+              </a:spcAft>
+            </a:pPr>
+            <a:r>
+              <a:rPr sz="650" b="1" i="0">
+                <a:solidFill>
+                  <a:srgbClr val="8A93A2"/>
+                </a:solidFill>
+                <a:latin typeface="Arial"/>
+              </a:rPr>
+              <a:t>FEED INTO CPI 2024</a:t>
+            </a:r>
+          </a:p>
+        </p:txBody>
+      </p:sp>
+      <p:sp>
+        <p:nvSpPr>
+          <p:cNvPr id="49" name="Rectangle 48"/>
+          <p:cNvSpPr/>
+          <p:nvPr/>
+        </p:nvSpPr>
+        <p:spPr>
+          <a:xfrm>
+            <a:off x="329184" y="6400800"/>
+            <a:ext cx="5577840" cy="7620"/>
+          </a:xfrm>
+          <a:prstGeom prst="rect">
+            <a:avLst/>
+          </a:prstGeom>
+          <a:solidFill>
+            <a:srgbClr val="D8DEE7"/>
+          </a:solidFill>
+          <a:ln>
+            <a:noFill/>
+          </a:ln>
+          <a:effectLst/>
+        </p:spPr>
+        <p:style>
+          <a:lnRef idx="1">
+            <a:schemeClr val="accent1"/>
+          </a:lnRef>
+          <a:fillRef idx="3">
+            <a:schemeClr val="accent1"/>
+          </a:fillRef>
+          <a:effectRef idx="2">
+            <a:schemeClr val="accent1"/>
+          </a:effectRef>
+          <a:fontRef idx="minor">
+            <a:schemeClr val="lt1"/>
+          </a:fontRef>
+        </p:style>
+        <p:txBody>
+          <a:bodyPr rtlCol="0" anchor="ctr"/>
+          <a:lstStyle/>
+          <a:p>
+            <a:pPr algn="ctr"/>
+          </a:p>
+        </p:txBody>
+      </p:sp>
+      <p:sp>
+        <p:nvSpPr>
+          <p:cNvPr id="50" name="TextBox 49"/>
+          <p:cNvSpPr txBox="1"/>
+          <p:nvPr/>
+        </p:nvSpPr>
+        <p:spPr>
+          <a:xfrm>
+            <a:off x="329184" y="6464808"/>
             <a:ext cx="5577840" cy="237744"/>
           </a:xfrm>
           <a:prstGeom prst="rect">
